--- a/docs/solver_reuse_slide.pptx
+++ b/docs/solver_reuse_slide.pptx
@@ -3916,7 +3916,7 @@
                 </a:solidFill>
                 <a:latin typeface="Calibri"/>
               </a:rPr>
-              <a:t>Same kernel iter/s in all turns; gains come from reuse + proof early-exit</a:t>
+              <a:t>Mean of 5 trials; gains compound from reuse + proof early-exit</a:t>
             </a:r>
           </a:p>
         </p:txBody>
@@ -4065,7 +4065,7 @@
                 </a:solidFill>
                 <a:latin typeface="Calibri"/>
               </a:rPr>
-              <a:t>25.3 ms</a:t>
+              <a:t>24.0 ms</a:t>
             </a:r>
           </a:p>
         </p:txBody>
@@ -4149,7 +4149,7 @@
         <p:spPr>
           <a:xfrm>
             <a:off x="2834639" y="3803904"/>
-            <a:ext cx="1637968" cy="182880"/>
+            <a:ext cx="1508760" cy="182880"/>
           </a:xfrm>
           <a:prstGeom prst="rect">
             <a:avLst/>
@@ -4192,7 +4192,7 @@
         </p:nvSpPr>
         <p:spPr>
           <a:xfrm>
-            <a:off x="4518328" y="3803904"/>
+            <a:off x="4389120" y="3803904"/>
             <a:ext cx="777240" cy="182880"/>
           </a:xfrm>
           <a:prstGeom prst="rect">
@@ -4214,7 +4214,7 @@
                 </a:solidFill>
                 <a:latin typeface="Calibri"/>
               </a:rPr>
-              <a:t>20.6 ms</a:t>
+              <a:t>18.0 ms</a:t>
             </a:r>
           </a:p>
         </p:txBody>
@@ -4284,7 +4284,7 @@
                 </a:solidFill>
                 <a:latin typeface="Calibri"/>
               </a:rPr>
-              <a:t>deeper compounding</a:t>
+              <a:t>typically proven (variance high)</a:t>
             </a:r>
           </a:p>
         </p:txBody>
@@ -4298,7 +4298,7 @@
         <p:spPr>
           <a:xfrm>
             <a:off x="2834639" y="4023360"/>
-            <a:ext cx="1248354" cy="182880"/>
+            <a:ext cx="528066" cy="182880"/>
           </a:xfrm>
           <a:prstGeom prst="rect">
             <a:avLst/>
@@ -4341,7 +4341,7 @@
         </p:nvSpPr>
         <p:spPr>
           <a:xfrm>
-            <a:off x="4128714" y="4023360"/>
+            <a:off x="3408425" y="4023360"/>
             <a:ext cx="777240" cy="182880"/>
           </a:xfrm>
           <a:prstGeom prst="rect">
@@ -4363,7 +4363,7 @@
                 </a:solidFill>
                 <a:latin typeface="Calibri"/>
               </a:rPr>
-              <a:t>15.7 ms</a:t>
+              <a:t>6.3 ms</a:t>
             </a:r>
           </a:p>
         </p:txBody>
@@ -4626,7 +4626,7 @@
                 </a:solidFill>
                 <a:latin typeface="Cambria"/>
               </a:rPr>
-              <a:t>25 ms → &lt; 1 ms</a:t>
+              <a:t>24 ms → &lt; 1 ms</a:t>
             </a:r>
           </a:p>
         </p:txBody>
@@ -4820,7 +4820,7 @@
                 </a:solidFill>
                 <a:latin typeface="Calibri"/>
               </a:rPr>
-              <a:t>Solver bookkeeping costs 0–30 % iter/s vs plain UCT; reuse adds an O(k) BFS compaction once per move.</a:t>
+              <a:t>Solver bookkeeping costs 1-25 % iter/s vs plain UCT; reuse adds an O(k) BFS compaction once per move.</a:t>
             </a:r>
           </a:p>
         </p:txBody>
